--- a/m8/diapositivos/sessao-06-m8-f10.pptx
+++ b/m8/diapositivos/sessao-06-m8-f10.pptx
@@ -1887,11 +1887,8 @@
                 <a:ea typeface="Georgia" pitchFamily="34" charset="-122"/>
                 <a:cs typeface="Georgia" pitchFamily="34" charset="-120"/>
               </a:rPr>
-              <a:t>Escolhe um poema de Sena, Eugénio ou Amaral e uma pintura ou um álbum musical que dialogue com ele.</a:t>
-            </a:r>
-            <a:endParaRPr lang="en-US" sz="2300" dirty="0"/>
-          </a:p>
-          <a:p>
+              <a:t>Escolhe um poema de Sena, Eugénio ou Amaral e </a:t>
+            </a:r>
             <a:pPr indent="0" marL="0">
               <a:lnSpc>
                 <a:spcPct val="120000"/>
@@ -1902,7 +1899,7 @@
               <a:buNone/>
             </a:pPr>
             <a:r>
-              <a:rPr lang="en-US" sz="2300" dirty="0">
+              <a:rPr lang="en-US" sz="2300" b="1" dirty="0">
                 <a:solidFill>
                   <a:srgbClr val="F2F0EA"/>
                 </a:solidFill>
@@ -1910,7 +1907,130 @@
                 <a:ea typeface="Georgia" pitchFamily="34" charset="-122"/>
                 <a:cs typeface="Georgia" pitchFamily="34" charset="-120"/>
               </a:rPr>
-              <a:t>Apresenta em 5–7 minutos: análise do poema (lentes, forma, recursos), análise da obra escolhida e comparação (semelhanças, diferenças, o que uma revela na outra). Mostra a imagem ou toca no máximo 30 segundos de uma faixa, com créditos. Nada de letras de canções projetadas.</a:t>
+              <a:t>uma pintura</a:t>
+            </a:r>
+            <a:pPr indent="0" marL="0">
+              <a:lnSpc>
+                <a:spcPct val="120000"/>
+              </a:lnSpc>
+              <a:spcAft>
+                <a:spcPts val="1000"/>
+              </a:spcAft>
+              <a:buNone/>
+            </a:pPr>
+            <a:r>
+              <a:rPr lang="en-US" sz="2300" dirty="0">
+                <a:solidFill>
+                  <a:srgbClr val="F2F0EA"/>
+                </a:solidFill>
+                <a:latin typeface="Georgia" pitchFamily="34" charset="0"/>
+                <a:ea typeface="Georgia" pitchFamily="34" charset="-122"/>
+                <a:cs typeface="Georgia" pitchFamily="34" charset="-120"/>
+              </a:rPr>
+              <a:t> ou </a:t>
+            </a:r>
+            <a:pPr indent="0" marL="0">
+              <a:lnSpc>
+                <a:spcPct val="120000"/>
+              </a:lnSpc>
+              <a:spcAft>
+                <a:spcPts val="1000"/>
+              </a:spcAft>
+              <a:buNone/>
+            </a:pPr>
+            <a:r>
+              <a:rPr lang="en-US" sz="2300" b="1" dirty="0">
+                <a:solidFill>
+                  <a:srgbClr val="F2F0EA"/>
+                </a:solidFill>
+                <a:latin typeface="Georgia" pitchFamily="34" charset="0"/>
+                <a:ea typeface="Georgia" pitchFamily="34" charset="-122"/>
+                <a:cs typeface="Georgia" pitchFamily="34" charset="-120"/>
+              </a:rPr>
+              <a:t>um álbum musical</a:t>
+            </a:r>
+            <a:pPr indent="0" marL="0">
+              <a:lnSpc>
+                <a:spcPct val="120000"/>
+              </a:lnSpc>
+              <a:spcAft>
+                <a:spcPts val="1000"/>
+              </a:spcAft>
+              <a:buNone/>
+            </a:pPr>
+            <a:r>
+              <a:rPr lang="en-US" sz="2300" dirty="0">
+                <a:solidFill>
+                  <a:srgbClr val="F2F0EA"/>
+                </a:solidFill>
+                <a:latin typeface="Georgia" pitchFamily="34" charset="0"/>
+                <a:ea typeface="Georgia" pitchFamily="34" charset="-122"/>
+                <a:cs typeface="Georgia" pitchFamily="34" charset="-120"/>
+              </a:rPr>
+              <a:t> que dialogue com ele.</a:t>
+            </a:r>
+            <a:endParaRPr lang="en-US" sz="2300" dirty="0"/>
+          </a:p>
+          <a:p>
+            <a:pPr indent="0" marL="0">
+              <a:lnSpc>
+                <a:spcPct val="120000"/>
+              </a:lnSpc>
+              <a:spcAft>
+                <a:spcPts val="1000"/>
+              </a:spcAft>
+              <a:buNone/>
+            </a:pPr>
+            <a:r>
+              <a:rPr lang="en-US" sz="2300" dirty="0">
+                <a:solidFill>
+                  <a:srgbClr val="F2F0EA"/>
+                </a:solidFill>
+                <a:latin typeface="Georgia" pitchFamily="34" charset="0"/>
+                <a:ea typeface="Georgia" pitchFamily="34" charset="-122"/>
+                <a:cs typeface="Georgia" pitchFamily="34" charset="-120"/>
+              </a:rPr>
+              <a:t>Apresenta em 5–7 minutos: análise do poema (lentes, forma, recursos), análise da obra escolhida e </a:t>
+            </a:r>
+            <a:pPr indent="0" marL="0">
+              <a:lnSpc>
+                <a:spcPct val="120000"/>
+              </a:lnSpc>
+              <a:spcAft>
+                <a:spcPts val="1000"/>
+              </a:spcAft>
+              <a:buNone/>
+            </a:pPr>
+            <a:r>
+              <a:rPr lang="en-US" sz="2300" b="1" dirty="0">
+                <a:solidFill>
+                  <a:srgbClr val="F2F0EA"/>
+                </a:solidFill>
+                <a:latin typeface="Georgia" pitchFamily="34" charset="0"/>
+                <a:ea typeface="Georgia" pitchFamily="34" charset="-122"/>
+                <a:cs typeface="Georgia" pitchFamily="34" charset="-120"/>
+              </a:rPr>
+              <a:t>comparação</a:t>
+            </a:r>
+            <a:pPr indent="0" marL="0">
+              <a:lnSpc>
+                <a:spcPct val="120000"/>
+              </a:lnSpc>
+              <a:spcAft>
+                <a:spcPts val="1000"/>
+              </a:spcAft>
+              <a:buNone/>
+            </a:pPr>
+            <a:r>
+              <a:rPr lang="en-US" sz="2300" dirty="0">
+                <a:solidFill>
+                  <a:srgbClr val="F2F0EA"/>
+                </a:solidFill>
+                <a:latin typeface="Georgia" pitchFamily="34" charset="0"/>
+                <a:ea typeface="Georgia" pitchFamily="34" charset="-122"/>
+                <a:cs typeface="Georgia" pitchFamily="34" charset="-120"/>
+              </a:rPr>
+              <a:t> (semelhanças, diferenças, o que uma revela na outra). Mostra a imagem ou toca no máximo 30 segundos de uma faixa, com créditos. Nada de letras de canções projetadas.</a:t>
             </a:r>
             <a:endParaRPr lang="en-US" sz="2300" dirty="0"/>
           </a:p>
